--- a/assets/figures-editable/c1-c2/c2-e30.pptx
+++ b/assets/figures-editable/c1-c2/c2-e30.pptx
@@ -7,7 +7,7 @@
   <p:sldIdLst>
     <p:sldId id="256" r:id="rId7"/>
   </p:sldIdLst>
-  <p:sldSz cx="11948160" cy="7924799" type="screen4x3"/>
+  <p:sldSz cx="12191695" cy="6858000" type="screen4x3"/>
   <p:notesSz cx="6858000" cy="9144000"/>
   <p:defaultTextStyle>
     <a:defPPr>
@@ -3098,14 +3098,14 @@
       <p:grpSpPr/>
       <p:sp>
         <p:nvSpPr>
-          <p:cNvPr id="2" name="text1" descr="sci-ppt:C2-E30-001"/>
+          <p:cNvPr id="2" name="C2-E30 text 0" descr="sci-ppt:o000"/>
           <p:cNvSpPr txBox="1"/>
           <p:nvPr/>
         </p:nvSpPr>
         <p:spPr>
           <a:xfrm>
-            <a:off x="316992" y="268224"/>
-            <a:ext cx="11277600" cy="359054"/>
+            <a:off x="274320" y="118872"/>
+            <a:ext cx="11612880" cy="340105"/>
           </a:xfrm>
           <a:prstGeom prst="rect">
             <a:avLst/>
@@ -3114,7 +3114,7 @@
           <a:effectLst/>
         </p:spPr>
         <p:txBody>
-          <a:bodyPr wrap="none" lIns="27432" rIns="27432" tIns="18288" bIns="18288" anchor="ctr">
+          <a:bodyPr wrap="none" lIns="18288" rIns="18288" tIns="18288" bIns="18288" anchor="t">
             <a:spAutoFit/>
           </a:bodyPr>
           <a:lstStyle/>
@@ -3125,69 +3125,1137 @@
               </a:spcAft>
             </a:pPr>
             <a:r>
-              <a:rPr sz="1823" b="0" i="0">
+              <a:rPr sz="1900" b="1" i="0">
                 <a:solidFill>
                   <a:srgbClr val="8EDBD4"/>
                 </a:solidFill>
                 <a:latin typeface="Arial"/>
               </a:rPr>
-              <a:t>C2-E30 | Physical-variable diagram</a:t>
-            </a:r>
-          </a:p>
-        </p:txBody>
-      </p:sp>
-      <p:sp>
-        <p:nvSpPr>
-          <p:cNvPr id="3" name="ellipse2" descr="sci-ppt:C2-E30-002"/>
-          <p:cNvSpPr/>
+              <a:t>C2-E30 · Derived ideal-vapor inventory radius</a:t>
+            </a:r>
+          </a:p>
+        </p:txBody>
+      </p:sp>
+      <p:cxnSp>
+        <p:nvCxnSpPr>
+          <p:cNvPr id="3" name="C2-E30 line 1" descr="sci-ppt:o001"/>
+          <p:cNvCxnSpPr/>
           <p:nvPr/>
-        </p:nvSpPr>
-        <p:spPr>
-          <a:xfrm>
-            <a:off x="1877568" y="2304288"/>
-            <a:ext cx="633984" cy="633984"/>
-          </a:xfrm>
-          <a:prstGeom prst="ellipse">
+        </p:nvCxnSpPr>
+        <p:spPr>
+          <a:xfrm>
+            <a:off x="914400" y="5029200"/>
+            <a:ext cx="5486400" cy="0"/>
+          </a:xfrm>
+          <a:prstGeom prst="line">
             <a:avLst/>
           </a:prstGeom>
-          <a:solidFill>
-            <a:srgbClr val="F6BC77"/>
-          </a:solidFill>
-          <a:ln w="21590">
+          <a:ln w="19050">
             <a:solidFill>
               <a:srgbClr val="B4C7D2"/>
             </a:solidFill>
           </a:ln>
           <a:effectLst/>
         </p:spPr>
-        <p:txBody>
-          <a:bodyPr rtlCol="0" anchor="ctr"/>
-          <a:lstStyle/>
-          <a:p>
-            <a:pPr algn="ctr"/>
-          </a:p>
-        </p:txBody>
-      </p:sp>
-      <p:sp>
-        <p:nvSpPr>
-          <p:cNvPr id="4" name="ellipse3" descr="sci-ppt:C2-E30-003"/>
+      </p:cxnSp>
+      <p:cxnSp>
+        <p:nvCxnSpPr>
+          <p:cNvPr id="4" name="C2-E30 line 2" descr="sci-ppt:o002"/>
+          <p:cNvCxnSpPr/>
+          <p:nvPr/>
+        </p:nvCxnSpPr>
+        <p:spPr>
+          <a:xfrm>
+            <a:off x="914400" y="1371600"/>
+            <a:ext cx="0" cy="3657600"/>
+          </a:xfrm>
+          <a:prstGeom prst="line">
+            <a:avLst/>
+          </a:prstGeom>
+          <a:ln w="19050">
+            <a:solidFill>
+              <a:srgbClr val="B4C7D2"/>
+            </a:solidFill>
+          </a:ln>
+          <a:effectLst/>
+        </p:spPr>
+      </p:cxnSp>
+      <p:cxnSp>
+        <p:nvCxnSpPr>
+          <p:cNvPr id="5" name="C2-E30 line 3" descr="sci-ppt:o003"/>
+          <p:cNvCxnSpPr/>
+          <p:nvPr/>
+        </p:nvCxnSpPr>
+        <p:spPr>
+          <a:xfrm>
+            <a:off x="914400" y="5029200"/>
+            <a:ext cx="0" cy="64008"/>
+          </a:xfrm>
+          <a:prstGeom prst="line">
+            <a:avLst/>
+          </a:prstGeom>
+          <a:ln w="12700">
+            <a:solidFill>
+              <a:srgbClr val="B4C7D2"/>
+            </a:solidFill>
+          </a:ln>
+          <a:effectLst/>
+        </p:spPr>
+      </p:cxnSp>
+      <p:cxnSp>
+        <p:nvCxnSpPr>
+          <p:cNvPr id="6" name="C2-E30 line 4" descr="sci-ppt:o004"/>
+          <p:cNvCxnSpPr/>
+          <p:nvPr/>
+        </p:nvCxnSpPr>
+        <p:spPr>
+          <a:xfrm>
+            <a:off x="914400" y="1371600"/>
+            <a:ext cx="0" cy="3657600"/>
+          </a:xfrm>
+          <a:prstGeom prst="line">
+            <a:avLst/>
+          </a:prstGeom>
+          <a:ln w="7620">
+            <a:solidFill>
+              <a:srgbClr val="2E4756"/>
+            </a:solidFill>
+          </a:ln>
+          <a:effectLst/>
+        </p:spPr>
+      </p:cxnSp>
+      <p:sp>
+        <p:nvSpPr>
+          <p:cNvPr id="7" name="C2-E30 text 5" descr="sci-ppt:o005"/>
+          <p:cNvSpPr txBox="1"/>
+          <p:nvPr/>
+        </p:nvSpPr>
+        <p:spPr>
+          <a:xfrm>
+            <a:off x="457200" y="5111496"/>
+            <a:ext cx="914400" cy="208407"/>
+          </a:xfrm>
+          <a:prstGeom prst="rect">
+            <a:avLst/>
+          </a:prstGeom>
+          <a:noFill/>
+          <a:effectLst/>
+        </p:spPr>
+        <p:txBody>
+          <a:bodyPr wrap="none" lIns="18288" rIns="18288" tIns="18288" bIns="18288" anchor="t">
+            <a:spAutoFit/>
+          </a:bodyPr>
+          <a:lstStyle/>
+          <a:p>
+            <a:pPr algn="ctr">
+              <a:spcAft>
+                <a:spcPts val="0"/>
+              </a:spcAft>
+            </a:pPr>
+            <a:r>
+              <a:rPr sz="1050" b="0" i="0">
+                <a:solidFill>
+                  <a:srgbClr val="B4C7D2"/>
+                </a:solidFill>
+                <a:latin typeface="Arial"/>
+              </a:rPr>
+              <a:t>1e+04</a:t>
+            </a:r>
+          </a:p>
+        </p:txBody>
+      </p:sp>
+      <p:cxnSp>
+        <p:nvCxnSpPr>
+          <p:cNvPr id="8" name="C2-E30 line 6" descr="sci-ppt:o006"/>
+          <p:cNvCxnSpPr/>
+          <p:nvPr/>
+        </p:nvCxnSpPr>
+        <p:spPr>
+          <a:xfrm>
+            <a:off x="3298723" y="5029200"/>
+            <a:ext cx="0" cy="64008"/>
+          </a:xfrm>
+          <a:prstGeom prst="line">
+            <a:avLst/>
+          </a:prstGeom>
+          <a:ln w="12700">
+            <a:solidFill>
+              <a:srgbClr val="B4C7D2"/>
+            </a:solidFill>
+          </a:ln>
+          <a:effectLst/>
+        </p:spPr>
+      </p:cxnSp>
+      <p:cxnSp>
+        <p:nvCxnSpPr>
+          <p:cNvPr id="9" name="C2-E30 line 7" descr="sci-ppt:o007"/>
+          <p:cNvCxnSpPr/>
+          <p:nvPr/>
+        </p:nvCxnSpPr>
+        <p:spPr>
+          <a:xfrm>
+            <a:off x="3298723" y="1371600"/>
+            <a:ext cx="0" cy="3657600"/>
+          </a:xfrm>
+          <a:prstGeom prst="line">
+            <a:avLst/>
+          </a:prstGeom>
+          <a:ln w="7620">
+            <a:solidFill>
+              <a:srgbClr val="2E4756"/>
+            </a:solidFill>
+          </a:ln>
+          <a:effectLst/>
+        </p:spPr>
+      </p:cxnSp>
+      <p:sp>
+        <p:nvSpPr>
+          <p:cNvPr id="10" name="C2-E30 text 8" descr="sci-ppt:o008"/>
+          <p:cNvSpPr txBox="1"/>
+          <p:nvPr/>
+        </p:nvSpPr>
+        <p:spPr>
+          <a:xfrm>
+            <a:off x="2841523" y="5111496"/>
+            <a:ext cx="914400" cy="208407"/>
+          </a:xfrm>
+          <a:prstGeom prst="rect">
+            <a:avLst/>
+          </a:prstGeom>
+          <a:noFill/>
+          <a:effectLst/>
+        </p:spPr>
+        <p:txBody>
+          <a:bodyPr wrap="none" lIns="18288" rIns="18288" tIns="18288" bIns="18288" anchor="t">
+            <a:spAutoFit/>
+          </a:bodyPr>
+          <a:lstStyle/>
+          <a:p>
+            <a:pPr algn="ctr">
+              <a:spcAft>
+                <a:spcPts val="0"/>
+              </a:spcAft>
+            </a:pPr>
+            <a:r>
+              <a:rPr sz="1050" b="0" i="0">
+                <a:solidFill>
+                  <a:srgbClr val="B4C7D2"/>
+                </a:solidFill>
+                <a:latin typeface="Arial"/>
+              </a:rPr>
+              <a:t>1e+05</a:t>
+            </a:r>
+          </a:p>
+        </p:txBody>
+      </p:sp>
+      <p:cxnSp>
+        <p:nvCxnSpPr>
+          <p:cNvPr id="11" name="C2-E30 line 9" descr="sci-ppt:o009"/>
+          <p:cNvCxnSpPr/>
+          <p:nvPr/>
+        </p:nvCxnSpPr>
+        <p:spPr>
+          <a:xfrm>
+            <a:off x="5683047" y="5029200"/>
+            <a:ext cx="0" cy="64008"/>
+          </a:xfrm>
+          <a:prstGeom prst="line">
+            <a:avLst/>
+          </a:prstGeom>
+          <a:ln w="12700">
+            <a:solidFill>
+              <a:srgbClr val="B4C7D2"/>
+            </a:solidFill>
+          </a:ln>
+          <a:effectLst/>
+        </p:spPr>
+      </p:cxnSp>
+      <p:cxnSp>
+        <p:nvCxnSpPr>
+          <p:cNvPr id="12" name="C2-E30 line 10" descr="sci-ppt:o010"/>
+          <p:cNvCxnSpPr/>
+          <p:nvPr/>
+        </p:nvCxnSpPr>
+        <p:spPr>
+          <a:xfrm>
+            <a:off x="5683047" y="1371600"/>
+            <a:ext cx="0" cy="3657600"/>
+          </a:xfrm>
+          <a:prstGeom prst="line">
+            <a:avLst/>
+          </a:prstGeom>
+          <a:ln w="7620">
+            <a:solidFill>
+              <a:srgbClr val="2E4756"/>
+            </a:solidFill>
+          </a:ln>
+          <a:effectLst/>
+        </p:spPr>
+      </p:cxnSp>
+      <p:sp>
+        <p:nvSpPr>
+          <p:cNvPr id="13" name="C2-E30 text 11" descr="sci-ppt:o011"/>
+          <p:cNvSpPr txBox="1"/>
+          <p:nvPr/>
+        </p:nvSpPr>
+        <p:spPr>
+          <a:xfrm>
+            <a:off x="5225847" y="5111496"/>
+            <a:ext cx="914400" cy="208407"/>
+          </a:xfrm>
+          <a:prstGeom prst="rect">
+            <a:avLst/>
+          </a:prstGeom>
+          <a:noFill/>
+          <a:effectLst/>
+        </p:spPr>
+        <p:txBody>
+          <a:bodyPr wrap="none" lIns="18288" rIns="18288" tIns="18288" bIns="18288" anchor="t">
+            <a:spAutoFit/>
+          </a:bodyPr>
+          <a:lstStyle/>
+          <a:p>
+            <a:pPr algn="ctr">
+              <a:spcAft>
+                <a:spcPts val="0"/>
+              </a:spcAft>
+            </a:pPr>
+            <a:r>
+              <a:rPr sz="1050" b="0" i="0">
+                <a:solidFill>
+                  <a:srgbClr val="B4C7D2"/>
+                </a:solidFill>
+                <a:latin typeface="Arial"/>
+              </a:rPr>
+              <a:t>1e+06</a:t>
+            </a:r>
+          </a:p>
+        </p:txBody>
+      </p:sp>
+      <p:cxnSp>
+        <p:nvCxnSpPr>
+          <p:cNvPr id="14" name="C2-E30 line 12" descr="sci-ppt:o012"/>
+          <p:cNvCxnSpPr/>
+          <p:nvPr/>
+        </p:nvCxnSpPr>
+        <p:spPr>
+          <a:xfrm>
+            <a:off x="850392" y="5029200"/>
+            <a:ext cx="64008" cy="0"/>
+          </a:xfrm>
+          <a:prstGeom prst="line">
+            <a:avLst/>
+          </a:prstGeom>
+          <a:ln w="12700">
+            <a:solidFill>
+              <a:srgbClr val="B4C7D2"/>
+            </a:solidFill>
+          </a:ln>
+          <a:effectLst/>
+        </p:spPr>
+      </p:cxnSp>
+      <p:cxnSp>
+        <p:nvCxnSpPr>
+          <p:cNvPr id="15" name="C2-E30 line 13" descr="sci-ppt:o013"/>
+          <p:cNvCxnSpPr/>
+          <p:nvPr/>
+        </p:nvCxnSpPr>
+        <p:spPr>
+          <a:xfrm>
+            <a:off x="850392" y="4093007"/>
+            <a:ext cx="64008" cy="0"/>
+          </a:xfrm>
+          <a:prstGeom prst="line">
+            <a:avLst/>
+          </a:prstGeom>
+          <a:ln w="12700">
+            <a:solidFill>
+              <a:srgbClr val="B4C7D2"/>
+            </a:solidFill>
+          </a:ln>
+          <a:effectLst/>
+        </p:spPr>
+      </p:cxnSp>
+      <p:cxnSp>
+        <p:nvCxnSpPr>
+          <p:cNvPr id="16" name="C2-E30 line 14" descr="sci-ppt:o014"/>
+          <p:cNvCxnSpPr/>
+          <p:nvPr/>
+        </p:nvCxnSpPr>
+        <p:spPr>
+          <a:xfrm>
+            <a:off x="914400" y="4093007"/>
+            <a:ext cx="5486400" cy="0"/>
+          </a:xfrm>
+          <a:prstGeom prst="line">
+            <a:avLst/>
+          </a:prstGeom>
+          <a:ln w="7620">
+            <a:solidFill>
+              <a:srgbClr val="2E4756"/>
+            </a:solidFill>
+          </a:ln>
+          <a:effectLst/>
+        </p:spPr>
+      </p:cxnSp>
+      <p:sp>
+        <p:nvSpPr>
+          <p:cNvPr id="17" name="C2-E30 text 15" descr="sci-ppt:o015"/>
+          <p:cNvSpPr txBox="1"/>
+          <p:nvPr/>
+        </p:nvSpPr>
+        <p:spPr>
+          <a:xfrm>
+            <a:off x="45720" y="4010711"/>
+            <a:ext cx="777240" cy="208407"/>
+          </a:xfrm>
+          <a:prstGeom prst="rect">
+            <a:avLst/>
+          </a:prstGeom>
+          <a:noFill/>
+          <a:effectLst/>
+        </p:spPr>
+        <p:txBody>
+          <a:bodyPr wrap="none" lIns="18288" rIns="18288" tIns="18288" bIns="18288" anchor="t">
+            <a:spAutoFit/>
+          </a:bodyPr>
+          <a:lstStyle/>
+          <a:p>
+            <a:pPr algn="r">
+              <a:spcAft>
+                <a:spcPts val="0"/>
+              </a:spcAft>
+            </a:pPr>
+            <a:r>
+              <a:rPr sz="1050" b="0" i="0">
+                <a:solidFill>
+                  <a:srgbClr val="B4C7D2"/>
+                </a:solidFill>
+                <a:latin typeface="Arial"/>
+              </a:rPr>
+              <a:t>2</a:t>
+            </a:r>
+          </a:p>
+        </p:txBody>
+      </p:sp>
+      <p:cxnSp>
+        <p:nvCxnSpPr>
+          <p:cNvPr id="18" name="C2-E30 line 16" descr="sci-ppt:o016"/>
+          <p:cNvCxnSpPr/>
+          <p:nvPr/>
+        </p:nvCxnSpPr>
+        <p:spPr>
+          <a:xfrm>
+            <a:off x="850392" y="2855429"/>
+            <a:ext cx="64008" cy="0"/>
+          </a:xfrm>
+          <a:prstGeom prst="line">
+            <a:avLst/>
+          </a:prstGeom>
+          <a:ln w="12700">
+            <a:solidFill>
+              <a:srgbClr val="B4C7D2"/>
+            </a:solidFill>
+          </a:ln>
+          <a:effectLst/>
+        </p:spPr>
+      </p:cxnSp>
+      <p:cxnSp>
+        <p:nvCxnSpPr>
+          <p:cNvPr id="19" name="C2-E30 line 17" descr="sci-ppt:o017"/>
+          <p:cNvCxnSpPr/>
+          <p:nvPr/>
+        </p:nvCxnSpPr>
+        <p:spPr>
+          <a:xfrm>
+            <a:off x="914400" y="2855429"/>
+            <a:ext cx="5486400" cy="0"/>
+          </a:xfrm>
+          <a:prstGeom prst="line">
+            <a:avLst/>
+          </a:prstGeom>
+          <a:ln w="7620">
+            <a:solidFill>
+              <a:srgbClr val="2E4756"/>
+            </a:solidFill>
+          </a:ln>
+          <a:effectLst/>
+        </p:spPr>
+      </p:cxnSp>
+      <p:sp>
+        <p:nvSpPr>
+          <p:cNvPr id="20" name="C2-E30 text 18" descr="sci-ppt:o018"/>
+          <p:cNvSpPr txBox="1"/>
+          <p:nvPr/>
+        </p:nvSpPr>
+        <p:spPr>
+          <a:xfrm>
+            <a:off x="45720" y="2773133"/>
+            <a:ext cx="777240" cy="208407"/>
+          </a:xfrm>
+          <a:prstGeom prst="rect">
+            <a:avLst/>
+          </a:prstGeom>
+          <a:noFill/>
+          <a:effectLst/>
+        </p:spPr>
+        <p:txBody>
+          <a:bodyPr wrap="none" lIns="18288" rIns="18288" tIns="18288" bIns="18288" anchor="t">
+            <a:spAutoFit/>
+          </a:bodyPr>
+          <a:lstStyle/>
+          <a:p>
+            <a:pPr algn="r">
+              <a:spcAft>
+                <a:spcPts val="0"/>
+              </a:spcAft>
+            </a:pPr>
+            <a:r>
+              <a:rPr sz="1050" b="0" i="0">
+                <a:solidFill>
+                  <a:srgbClr val="B4C7D2"/>
+                </a:solidFill>
+                <a:latin typeface="Arial"/>
+              </a:rPr>
+              <a:t>5</a:t>
+            </a:r>
+          </a:p>
+        </p:txBody>
+      </p:sp>
+      <p:cxnSp>
+        <p:nvCxnSpPr>
+          <p:cNvPr id="21" name="C2-E30 line 19" descr="sci-ppt:o019"/>
+          <p:cNvCxnSpPr/>
+          <p:nvPr/>
+        </p:nvCxnSpPr>
+        <p:spPr>
+          <a:xfrm>
+            <a:off x="850392" y="1919237"/>
+            <a:ext cx="64008" cy="0"/>
+          </a:xfrm>
+          <a:prstGeom prst="line">
+            <a:avLst/>
+          </a:prstGeom>
+          <a:ln w="12700">
+            <a:solidFill>
+              <a:srgbClr val="B4C7D2"/>
+            </a:solidFill>
+          </a:ln>
+          <a:effectLst/>
+        </p:spPr>
+      </p:cxnSp>
+      <p:cxnSp>
+        <p:nvCxnSpPr>
+          <p:cNvPr id="22" name="C2-E30 line 20" descr="sci-ppt:o020"/>
+          <p:cNvCxnSpPr/>
+          <p:nvPr/>
+        </p:nvCxnSpPr>
+        <p:spPr>
+          <a:xfrm>
+            <a:off x="914400" y="1919237"/>
+            <a:ext cx="5486400" cy="0"/>
+          </a:xfrm>
+          <a:prstGeom prst="line">
+            <a:avLst/>
+          </a:prstGeom>
+          <a:ln w="7620">
+            <a:solidFill>
+              <a:srgbClr val="2E4756"/>
+            </a:solidFill>
+          </a:ln>
+          <a:effectLst/>
+        </p:spPr>
+      </p:cxnSp>
+      <p:sp>
+        <p:nvSpPr>
+          <p:cNvPr id="23" name="C2-E30 text 21" descr="sci-ppt:o021"/>
+          <p:cNvSpPr txBox="1"/>
+          <p:nvPr/>
+        </p:nvSpPr>
+        <p:spPr>
+          <a:xfrm>
+            <a:off x="45720" y="1836941"/>
+            <a:ext cx="777240" cy="208407"/>
+          </a:xfrm>
+          <a:prstGeom prst="rect">
+            <a:avLst/>
+          </a:prstGeom>
+          <a:noFill/>
+          <a:effectLst/>
+        </p:spPr>
+        <p:txBody>
+          <a:bodyPr wrap="none" lIns="18288" rIns="18288" tIns="18288" bIns="18288" anchor="t">
+            <a:spAutoFit/>
+          </a:bodyPr>
+          <a:lstStyle/>
+          <a:p>
+            <a:pPr algn="r">
+              <a:spcAft>
+                <a:spcPts val="0"/>
+              </a:spcAft>
+            </a:pPr>
+            <a:r>
+              <a:rPr sz="1050" b="0" i="0">
+                <a:solidFill>
+                  <a:srgbClr val="B4C7D2"/>
+                </a:solidFill>
+                <a:latin typeface="Arial"/>
+              </a:rPr>
+              <a:t>10</a:t>
+            </a:r>
+          </a:p>
+        </p:txBody>
+      </p:sp>
+      <p:sp>
+        <p:nvSpPr>
+          <p:cNvPr id="24" name="C2-E30 text 22" descr="sci-ppt:o022"/>
+          <p:cNvSpPr txBox="1"/>
+          <p:nvPr/>
+        </p:nvSpPr>
+        <p:spPr>
+          <a:xfrm>
+            <a:off x="914400" y="5312664"/>
+            <a:ext cx="5486400" cy="231648"/>
+          </a:xfrm>
+          <a:prstGeom prst="rect">
+            <a:avLst/>
+          </a:prstGeom>
+          <a:noFill/>
+          <a:effectLst/>
+        </p:spPr>
+        <p:txBody>
+          <a:bodyPr wrap="none" lIns="18288" rIns="18288" tIns="18288" bIns="18288" anchor="t">
+            <a:spAutoFit/>
+          </a:bodyPr>
+          <a:lstStyle/>
+          <a:p>
+            <a:pPr algn="ctr">
+              <a:spcAft>
+                <a:spcPts val="0"/>
+              </a:spcAft>
+            </a:pPr>
+            <a:r>
+              <a:rPr sz="1200" b="0" i="0">
+                <a:solidFill>
+                  <a:srgbClr val="E7F0F3"/>
+                </a:solidFill>
+                <a:latin typeface="Arial"/>
+              </a:rPr>
+              <a:t>PFC partial pressure pᵥ,PFC  (Pa)</a:t>
+            </a:r>
+          </a:p>
+        </p:txBody>
+      </p:sp>
+      <p:sp>
+        <p:nvSpPr>
+          <p:cNvPr id="25" name="C2-E30 text 23" descr="sci-ppt:o023"/>
+          <p:cNvSpPr txBox="1"/>
+          <p:nvPr/>
+        </p:nvSpPr>
+        <p:spPr>
+          <a:xfrm>
+            <a:off x="365760" y="1024128"/>
+            <a:ext cx="5486400" cy="231648"/>
+          </a:xfrm>
+          <a:prstGeom prst="rect">
+            <a:avLst/>
+          </a:prstGeom>
+          <a:noFill/>
+          <a:effectLst/>
+        </p:spPr>
+        <p:txBody>
+          <a:bodyPr wrap="none" lIns="18288" rIns="18288" tIns="18288" bIns="18288" anchor="t">
+            <a:spAutoFit/>
+          </a:bodyPr>
+          <a:lstStyle/>
+          <a:p>
+            <a:pPr algn="l">
+              <a:spcAft>
+                <a:spcPts val="0"/>
+              </a:spcAft>
+            </a:pPr>
+            <a:r>
+              <a:rPr sz="1200" b="0" i="0">
+                <a:solidFill>
+                  <a:srgbClr val="E7F0F3"/>
+                </a:solidFill>
+                <a:latin typeface="Arial"/>
+              </a:rPr>
+              <a:t>R_b,inv / a₀</a:t>
+            </a:r>
+          </a:p>
+        </p:txBody>
+      </p:sp>
+      <p:sp>
+        <p:nvSpPr>
+          <p:cNvPr id="26" name="C2-E30 polygon 24" descr="sci-ppt:o024"/>
           <p:cNvSpPr/>
           <p:nvPr/>
         </p:nvSpPr>
         <p:spPr>
           <a:xfrm>
-            <a:off x="6217920" y="914400"/>
-            <a:ext cx="3413760" cy="3413760"/>
+            <a:off x="914400" y="1730585"/>
+            <a:ext cx="5483944" cy="2384304"/>
+          </a:xfrm>
+          <a:custGeom>
+            <a:avLst/>
+            <a:gdLst/>
+            <a:ahLst/>
+            <a:cxnLst/>
+            <a:rect l="l" t="t" r="r" b="b"/>
+            <a:pathLst>
+              <a:path w="5483944" h="2384304">
+                <a:moveTo>
+                  <a:pt x="0" y="0"/>
+                </a:moveTo>
+                <a:lnTo>
+                  <a:pt x="55393" y="24083"/>
+                </a:lnTo>
+                <a:lnTo>
+                  <a:pt x="110786" y="48167"/>
+                </a:lnTo>
+                <a:lnTo>
+                  <a:pt x="166180" y="72251"/>
+                </a:lnTo>
+                <a:lnTo>
+                  <a:pt x="221573" y="96335"/>
+                </a:lnTo>
+                <a:lnTo>
+                  <a:pt x="276966" y="120419"/>
+                </a:lnTo>
+                <a:lnTo>
+                  <a:pt x="332360" y="144503"/>
+                </a:lnTo>
+                <a:lnTo>
+                  <a:pt x="387753" y="168587"/>
+                </a:lnTo>
+                <a:lnTo>
+                  <a:pt x="443147" y="192671"/>
+                </a:lnTo>
+                <a:lnTo>
+                  <a:pt x="498540" y="216755"/>
+                </a:lnTo>
+                <a:lnTo>
+                  <a:pt x="553933" y="240838"/>
+                </a:lnTo>
+                <a:lnTo>
+                  <a:pt x="609327" y="264922"/>
+                </a:lnTo>
+                <a:lnTo>
+                  <a:pt x="664720" y="289006"/>
+                </a:lnTo>
+                <a:lnTo>
+                  <a:pt x="720113" y="313090"/>
+                </a:lnTo>
+                <a:lnTo>
+                  <a:pt x="775507" y="337174"/>
+                </a:lnTo>
+                <a:lnTo>
+                  <a:pt x="830900" y="361258"/>
+                </a:lnTo>
+                <a:lnTo>
+                  <a:pt x="886294" y="385342"/>
+                </a:lnTo>
+                <a:lnTo>
+                  <a:pt x="941687" y="409426"/>
+                </a:lnTo>
+                <a:lnTo>
+                  <a:pt x="997080" y="433510"/>
+                </a:lnTo>
+                <a:lnTo>
+                  <a:pt x="1052474" y="457593"/>
+                </a:lnTo>
+                <a:lnTo>
+                  <a:pt x="1107867" y="481677"/>
+                </a:lnTo>
+                <a:lnTo>
+                  <a:pt x="1163260" y="505761"/>
+                </a:lnTo>
+                <a:lnTo>
+                  <a:pt x="1218654" y="529845"/>
+                </a:lnTo>
+                <a:lnTo>
+                  <a:pt x="1274047" y="553929"/>
+                </a:lnTo>
+                <a:lnTo>
+                  <a:pt x="1329441" y="578013"/>
+                </a:lnTo>
+                <a:lnTo>
+                  <a:pt x="1384834" y="602097"/>
+                </a:lnTo>
+                <a:lnTo>
+                  <a:pt x="1440227" y="626181"/>
+                </a:lnTo>
+                <a:lnTo>
+                  <a:pt x="1495621" y="650265"/>
+                </a:lnTo>
+                <a:lnTo>
+                  <a:pt x="1551014" y="674348"/>
+                </a:lnTo>
+                <a:lnTo>
+                  <a:pt x="1606407" y="698432"/>
+                </a:lnTo>
+                <a:lnTo>
+                  <a:pt x="1661801" y="722516"/>
+                </a:lnTo>
+                <a:lnTo>
+                  <a:pt x="1717194" y="746600"/>
+                </a:lnTo>
+                <a:lnTo>
+                  <a:pt x="1772588" y="770684"/>
+                </a:lnTo>
+                <a:lnTo>
+                  <a:pt x="1827981" y="794768"/>
+                </a:lnTo>
+                <a:lnTo>
+                  <a:pt x="1883374" y="818852"/>
+                </a:lnTo>
+                <a:lnTo>
+                  <a:pt x="1938768" y="842936"/>
+                </a:lnTo>
+                <a:lnTo>
+                  <a:pt x="1994161" y="867020"/>
+                </a:lnTo>
+                <a:lnTo>
+                  <a:pt x="2049554" y="891103"/>
+                </a:lnTo>
+                <a:lnTo>
+                  <a:pt x="2104948" y="915187"/>
+                </a:lnTo>
+                <a:lnTo>
+                  <a:pt x="2160341" y="939271"/>
+                </a:lnTo>
+                <a:lnTo>
+                  <a:pt x="2215735" y="963355"/>
+                </a:lnTo>
+                <a:lnTo>
+                  <a:pt x="2271128" y="987439"/>
+                </a:lnTo>
+                <a:lnTo>
+                  <a:pt x="2326521" y="1011523"/>
+                </a:lnTo>
+                <a:lnTo>
+                  <a:pt x="2381915" y="1035607"/>
+                </a:lnTo>
+                <a:lnTo>
+                  <a:pt x="2437308" y="1059691"/>
+                </a:lnTo>
+                <a:lnTo>
+                  <a:pt x="2492701" y="1083775"/>
+                </a:lnTo>
+                <a:lnTo>
+                  <a:pt x="2548095" y="1107858"/>
+                </a:lnTo>
+                <a:lnTo>
+                  <a:pt x="2603488" y="1131942"/>
+                </a:lnTo>
+                <a:lnTo>
+                  <a:pt x="2658882" y="1156026"/>
+                </a:lnTo>
+                <a:lnTo>
+                  <a:pt x="2714275" y="1180110"/>
+                </a:lnTo>
+                <a:lnTo>
+                  <a:pt x="2769668" y="1204194"/>
+                </a:lnTo>
+                <a:lnTo>
+                  <a:pt x="2825062" y="1228278"/>
+                </a:lnTo>
+                <a:lnTo>
+                  <a:pt x="2880455" y="1252362"/>
+                </a:lnTo>
+                <a:lnTo>
+                  <a:pt x="2935848" y="1276446"/>
+                </a:lnTo>
+                <a:lnTo>
+                  <a:pt x="2991242" y="1300529"/>
+                </a:lnTo>
+                <a:lnTo>
+                  <a:pt x="3046635" y="1324613"/>
+                </a:lnTo>
+                <a:lnTo>
+                  <a:pt x="3102029" y="1348697"/>
+                </a:lnTo>
+                <a:lnTo>
+                  <a:pt x="3157422" y="1372781"/>
+                </a:lnTo>
+                <a:lnTo>
+                  <a:pt x="3212815" y="1396865"/>
+                </a:lnTo>
+                <a:lnTo>
+                  <a:pt x="3268209" y="1420949"/>
+                </a:lnTo>
+                <a:lnTo>
+                  <a:pt x="3323602" y="1445033"/>
+                </a:lnTo>
+                <a:lnTo>
+                  <a:pt x="3378995" y="1469117"/>
+                </a:lnTo>
+                <a:lnTo>
+                  <a:pt x="3434389" y="1493201"/>
+                </a:lnTo>
+                <a:lnTo>
+                  <a:pt x="3489782" y="1517284"/>
+                </a:lnTo>
+                <a:lnTo>
+                  <a:pt x="3545176" y="1541368"/>
+                </a:lnTo>
+                <a:lnTo>
+                  <a:pt x="3600569" y="1565452"/>
+                </a:lnTo>
+                <a:lnTo>
+                  <a:pt x="3655962" y="1589536"/>
+                </a:lnTo>
+                <a:lnTo>
+                  <a:pt x="3711356" y="1613620"/>
+                </a:lnTo>
+                <a:lnTo>
+                  <a:pt x="3766749" y="1637704"/>
+                </a:lnTo>
+                <a:lnTo>
+                  <a:pt x="3822142" y="1661788"/>
+                </a:lnTo>
+                <a:lnTo>
+                  <a:pt x="3877536" y="1685872"/>
+                </a:lnTo>
+                <a:lnTo>
+                  <a:pt x="3932929" y="1709956"/>
+                </a:lnTo>
+                <a:lnTo>
+                  <a:pt x="3988323" y="1734039"/>
+                </a:lnTo>
+                <a:lnTo>
+                  <a:pt x="4043716" y="1758123"/>
+                </a:lnTo>
+                <a:lnTo>
+                  <a:pt x="4099109" y="1782207"/>
+                </a:lnTo>
+                <a:lnTo>
+                  <a:pt x="4154503" y="1806291"/>
+                </a:lnTo>
+                <a:lnTo>
+                  <a:pt x="4209896" y="1830375"/>
+                </a:lnTo>
+                <a:lnTo>
+                  <a:pt x="4265289" y="1854459"/>
+                </a:lnTo>
+                <a:lnTo>
+                  <a:pt x="4320683" y="1878543"/>
+                </a:lnTo>
+                <a:lnTo>
+                  <a:pt x="4376076" y="1902627"/>
+                </a:lnTo>
+                <a:lnTo>
+                  <a:pt x="4431470" y="1926711"/>
+                </a:lnTo>
+                <a:lnTo>
+                  <a:pt x="4486863" y="1950794"/>
+                </a:lnTo>
+                <a:lnTo>
+                  <a:pt x="4542256" y="1974878"/>
+                </a:lnTo>
+                <a:lnTo>
+                  <a:pt x="4597650" y="1998962"/>
+                </a:lnTo>
+                <a:lnTo>
+                  <a:pt x="4653043" y="2023046"/>
+                </a:lnTo>
+                <a:lnTo>
+                  <a:pt x="4708436" y="2047130"/>
+                </a:lnTo>
+                <a:lnTo>
+                  <a:pt x="4763830" y="2071214"/>
+                </a:lnTo>
+                <a:lnTo>
+                  <a:pt x="4819223" y="2095298"/>
+                </a:lnTo>
+                <a:lnTo>
+                  <a:pt x="4874617" y="2119382"/>
+                </a:lnTo>
+                <a:lnTo>
+                  <a:pt x="4930010" y="2143466"/>
+                </a:lnTo>
+                <a:lnTo>
+                  <a:pt x="4985403" y="2167549"/>
+                </a:lnTo>
+                <a:lnTo>
+                  <a:pt x="5040797" y="2191633"/>
+                </a:lnTo>
+                <a:lnTo>
+                  <a:pt x="5096190" y="2215717"/>
+                </a:lnTo>
+                <a:lnTo>
+                  <a:pt x="5151583" y="2239801"/>
+                </a:lnTo>
+                <a:lnTo>
+                  <a:pt x="5206977" y="2263885"/>
+                </a:lnTo>
+                <a:lnTo>
+                  <a:pt x="5262370" y="2287969"/>
+                </a:lnTo>
+                <a:lnTo>
+                  <a:pt x="5317764" y="2312053"/>
+                </a:lnTo>
+                <a:lnTo>
+                  <a:pt x="5373157" y="2336137"/>
+                </a:lnTo>
+                <a:lnTo>
+                  <a:pt x="5428550" y="2360220"/>
+                </a:lnTo>
+                <a:lnTo>
+                  <a:pt x="5483944" y="2384304"/>
+                </a:lnTo>
+              </a:path>
+            </a:pathLst>
+          </a:custGeom>
+          <a:noFill/>
+          <a:ln w="38100">
+            <a:solidFill>
+              <a:srgbClr val="8EDBD4"/>
+            </a:solidFill>
+          </a:ln>
+          <a:effectLst/>
+        </p:spPr>
+        <p:txBody>
+          <a:bodyPr rtlCol="0" anchor="ctr"/>
+          <a:lstStyle/>
+          <a:p>
+            <a:pPr algn="ctr"/>
+          </a:p>
+        </p:txBody>
+      </p:sp>
+      <p:sp>
+        <p:nvSpPr>
+          <p:cNvPr id="27" name="C2-E30 ellipse 25" descr="sci-ppt:o025"/>
+          <p:cNvSpPr/>
+          <p:nvPr/>
+        </p:nvSpPr>
+        <p:spPr>
+          <a:xfrm>
+            <a:off x="3225571" y="2694087"/>
+            <a:ext cx="146304" cy="146304"/>
           </a:xfrm>
           <a:prstGeom prst="ellipse">
+            <a:avLst/>
+          </a:prstGeom>
+          <a:solidFill>
+            <a:srgbClr val="F2B880"/>
+          </a:solidFill>
+          <a:ln w="12700">
+            <a:solidFill>
+              <a:srgbClr val="F2B880"/>
+            </a:solidFill>
+          </a:ln>
+          <a:effectLst/>
+        </p:spPr>
+        <p:txBody>
+          <a:bodyPr rtlCol="0" anchor="ctr"/>
+          <a:lstStyle/>
+          <a:p>
+            <a:pPr algn="ctr"/>
+          </a:p>
+        </p:txBody>
+      </p:sp>
+      <p:sp>
+        <p:nvSpPr>
+          <p:cNvPr id="28" name="C2-E30 text 26" descr="sci-ppt:o026"/>
+          <p:cNvSpPr txBox="1"/>
+          <p:nvPr/>
+        </p:nvSpPr>
+        <p:spPr>
+          <a:xfrm>
+            <a:off x="3408451" y="2310039"/>
+            <a:ext cx="2560320" cy="231648"/>
+          </a:xfrm>
+          <a:prstGeom prst="rect">
+            <a:avLst/>
+          </a:prstGeom>
+          <a:noFill/>
+          <a:effectLst/>
+        </p:spPr>
+        <p:txBody>
+          <a:bodyPr wrap="none" lIns="18288" rIns="18288" tIns="18288" bIns="18288" anchor="t">
+            <a:spAutoFit/>
+          </a:bodyPr>
+          <a:lstStyle/>
+          <a:p>
+            <a:pPr algn="l">
+              <a:spcAft>
+                <a:spcPts val="0"/>
+              </a:spcAft>
+            </a:pPr>
+            <a:r>
+              <a:rPr sz="1200" b="0" i="0">
+                <a:solidFill>
+                  <a:srgbClr val="F2B880"/>
+                </a:solidFill>
+                <a:latin typeface="Arial"/>
+              </a:rPr>
+              <a:t>1 bar: 5.337 a₀ = 26.69 µm</a:t>
+            </a:r>
+          </a:p>
+        </p:txBody>
+      </p:sp>
+      <p:sp>
+        <p:nvSpPr>
+          <p:cNvPr id="29" name="C2-E30 text 27" descr="sci-ppt:o027"/>
+          <p:cNvSpPr txBox="1"/>
+          <p:nvPr/>
+        </p:nvSpPr>
+        <p:spPr>
+          <a:xfrm>
+            <a:off x="1705304" y="2047301"/>
+            <a:ext cx="1645920" cy="239395"/>
+          </a:xfrm>
+          <a:prstGeom prst="rect">
+            <a:avLst/>
+          </a:prstGeom>
+          <a:noFill/>
+          <a:effectLst/>
+        </p:spPr>
+        <p:txBody>
+          <a:bodyPr wrap="none" lIns="18288" rIns="18288" tIns="18288" bIns="18288" anchor="t">
+            <a:spAutoFit/>
+          </a:bodyPr>
+          <a:lstStyle/>
+          <a:p>
+            <a:pPr algn="l">
+              <a:spcAft>
+                <a:spcPts val="0"/>
+              </a:spcAft>
+            </a:pPr>
+            <a:r>
+              <a:rPr sz="1250" b="0" i="0">
+                <a:solidFill>
+                  <a:srgbClr val="8EDBD4"/>
+                </a:solidFill>
+                <a:latin typeface="Arial"/>
+              </a:rPr>
+              <a:t>R ∝ p^(−1/3)</a:t>
+            </a:r>
+          </a:p>
+        </p:txBody>
+      </p:sp>
+      <p:sp>
+        <p:nvSpPr>
+          <p:cNvPr id="30" name="C2-E30 round_rect 28" descr="sci-ppt:o028"/>
+          <p:cNvSpPr/>
+          <p:nvPr/>
+        </p:nvSpPr>
+        <p:spPr>
+          <a:xfrm>
+            <a:off x="6766560" y="1371600"/>
+            <a:ext cx="5074920" cy="3657600"/>
+          </a:xfrm>
+          <a:prstGeom prst="roundRect">
             <a:avLst/>
           </a:prstGeom>
           <a:solidFill>
             <a:srgbClr val="213E4B"/>
           </a:solidFill>
-          <a:ln w="21590">
+          <a:ln w="20320">
             <a:solidFill>
-              <a:srgbClr val="B4C7D2"/>
+              <a:srgbClr val="8EDBD4"/>
             </a:solidFill>
           </a:ln>
           <a:effectLst/>
@@ -3200,40 +4268,16 @@
           </a:p>
         </p:txBody>
       </p:sp>
-      <p:cxnSp>
-        <p:nvCxnSpPr>
-          <p:cNvPr id="5" name="arrow4" descr="sci-ppt:C2-E30-004"/>
-          <p:cNvCxnSpPr/>
-          <p:nvPr/>
-        </p:nvCxnSpPr>
-        <p:spPr>
-          <a:xfrm>
-            <a:off x="2804160" y="2621280"/>
-            <a:ext cx="3108960" cy="0"/>
-          </a:xfrm>
-          <a:prstGeom prst="line">
-            <a:avLst/>
-          </a:prstGeom>
-          <a:ln w="25400">
-            <a:solidFill>
-              <a:srgbClr val="8EDBD4"/>
-            </a:solidFill>
-            <a:headEnd type="none" w="med" len="med"/>
-            <a:tailEnd type="triangle" w="med" len="med"/>
-          </a:ln>
-          <a:effectLst/>
-        </p:spPr>
-      </p:cxnSp>
-      <p:sp>
-        <p:nvSpPr>
-          <p:cNvPr id="6" name="text5" descr="sci-ppt:C2-E30-005"/>
+      <p:sp>
+        <p:nvSpPr>
+          <p:cNvPr id="31" name="C2-E30 text 29" descr="sci-ppt:o029"/>
           <p:cNvSpPr txBox="1"/>
           <p:nvPr/>
         </p:nvSpPr>
         <p:spPr>
           <a:xfrm>
-            <a:off x="1219200" y="3291840"/>
-            <a:ext cx="3657600" cy="359054"/>
+            <a:off x="6876288" y="1426464"/>
+            <a:ext cx="4855464" cy="254889"/>
           </a:xfrm>
           <a:prstGeom prst="rect">
             <a:avLst/>
@@ -3242,7 +4286,7 @@
           <a:effectLst/>
         </p:spPr>
         <p:txBody>
-          <a:bodyPr wrap="none" lIns="27432" rIns="27432" tIns="18288" bIns="18288" anchor="ctr">
+          <a:bodyPr wrap="none" lIns="18288" rIns="18288" tIns="18288" bIns="18288" anchor="t">
             <a:spAutoFit/>
           </a:bodyPr>
           <a:lstStyle/>
@@ -3253,27 +4297,131 @@
               </a:spcAft>
             </a:pPr>
             <a:r>
-              <a:rPr sz="1823" b="0" i="0">
+              <a:rPr sz="1350" b="1" i="0">
+                <a:solidFill>
+                  <a:srgbClr val="8EDBD4"/>
+                </a:solidFill>
+                <a:latin typeface="Arial"/>
+              </a:rPr>
+              <a:t>To scale at 1 bar and 323 K</a:t>
+            </a:r>
+          </a:p>
+        </p:txBody>
+      </p:sp>
+      <p:sp>
+        <p:nvSpPr>
+          <p:cNvPr id="32" name="C2-E30 ellipse 30" descr="sci-ppt:o030"/>
+          <p:cNvSpPr/>
+          <p:nvPr/>
+        </p:nvSpPr>
+        <p:spPr>
+          <a:xfrm>
+            <a:off x="8686800" y="2788920"/>
+            <a:ext cx="2194560" cy="2194560"/>
+          </a:xfrm>
+          <a:prstGeom prst="ellipse">
+            <a:avLst/>
+          </a:prstGeom>
+          <a:solidFill>
+            <a:srgbClr val="0C1820"/>
+          </a:solidFill>
+          <a:ln w="30480">
+            <a:solidFill>
+              <a:srgbClr val="F2B880"/>
+            </a:solidFill>
+          </a:ln>
+          <a:effectLst/>
+        </p:spPr>
+        <p:txBody>
+          <a:bodyPr rtlCol="0" anchor="ctr"/>
+          <a:lstStyle/>
+          <a:p>
+            <a:pPr algn="ctr"/>
+          </a:p>
+        </p:txBody>
+      </p:sp>
+      <p:sp>
+        <p:nvSpPr>
+          <p:cNvPr id="33" name="C2-E30 ellipse 31" descr="sci-ppt:o031"/>
+          <p:cNvSpPr/>
+          <p:nvPr/>
+        </p:nvSpPr>
+        <p:spPr>
+          <a:xfrm>
+            <a:off x="9578495" y="3680615"/>
+            <a:ext cx="411168" cy="411168"/>
+          </a:xfrm>
+          <a:prstGeom prst="ellipse">
+            <a:avLst/>
+          </a:prstGeom>
+          <a:solidFill>
+            <a:srgbClr val="1E4A5A"/>
+          </a:solidFill>
+          <a:ln w="27940">
+            <a:solidFill>
+              <a:srgbClr val="8EDBD4"/>
+            </a:solidFill>
+          </a:ln>
+          <a:effectLst/>
+        </p:spPr>
+        <p:txBody>
+          <a:bodyPr rtlCol="0" anchor="ctr"/>
+          <a:lstStyle/>
+          <a:p>
+            <a:pPr algn="ctr"/>
+          </a:p>
+        </p:txBody>
+      </p:sp>
+      <p:sp>
+        <p:nvSpPr>
+          <p:cNvPr id="34" name="C2-E30 text 32" descr="sci-ppt:o032"/>
+          <p:cNvSpPr txBox="1"/>
+          <p:nvPr/>
+        </p:nvSpPr>
+        <p:spPr>
+          <a:xfrm>
+            <a:off x="6903720" y="1828800"/>
+            <a:ext cx="4846320" cy="231648"/>
+          </a:xfrm>
+          <a:prstGeom prst="rect">
+            <a:avLst/>
+          </a:prstGeom>
+          <a:noFill/>
+          <a:effectLst/>
+        </p:spPr>
+        <p:txBody>
+          <a:bodyPr wrap="none" lIns="18288" rIns="18288" tIns="18288" bIns="18288" anchor="t">
+            <a:spAutoFit/>
+          </a:bodyPr>
+          <a:lstStyle/>
+          <a:p>
+            <a:pPr algn="l">
+              <a:spcAft>
+                <a:spcPts val="0"/>
+              </a:spcAft>
+            </a:pPr>
+            <a:r>
+              <a:rPr sz="1200" b="1" i="0">
                 <a:solidFill>
                   <a:srgbClr val="E7F0F3"/>
                 </a:solidFill>
                 <a:latin typeface="Arial"/>
               </a:rPr>
-              <a:t>Liquid: a0 = 5 um</a:t>
-            </a:r>
-          </a:p>
-        </p:txBody>
-      </p:sp>
-      <p:sp>
-        <p:nvSpPr>
-          <p:cNvPr id="7" name="text6" descr="sci-ppt:C2-E30-006"/>
+              <a:t>(R_b,inv / a₀)³ = ρ_d Rᵤ T* / (M_PFC pᵥ,PFC) = 151.98</a:t>
+            </a:r>
+          </a:p>
+        </p:txBody>
+      </p:sp>
+      <p:sp>
+        <p:nvSpPr>
+          <p:cNvPr id="35" name="C2-E30 text 33" descr="sci-ppt:o033"/>
           <p:cNvSpPr txBox="1"/>
           <p:nvPr/>
         </p:nvSpPr>
         <p:spPr>
           <a:xfrm>
-            <a:off x="5974080" y="4450080"/>
-            <a:ext cx="5486400" cy="340156"/>
+            <a:off x="6903720" y="2468880"/>
+            <a:ext cx="2651760" cy="417576"/>
           </a:xfrm>
           <a:prstGeom prst="rect">
             <a:avLst/>
@@ -3282,7 +4430,7 @@
           <a:effectLst/>
         </p:spPr>
         <p:txBody>
-          <a:bodyPr wrap="none" lIns="27432" rIns="27432" tIns="18288" bIns="18288" anchor="ctr">
+          <a:bodyPr wrap="none" lIns="18288" rIns="18288" tIns="18288" bIns="18288" anchor="t">
             <a:spAutoFit/>
           </a:bodyPr>
           <a:lstStyle/>
@@ -3293,27 +4441,123 @@
               </a:spcAft>
             </a:pPr>
             <a:r>
-              <a:rPr sz="1728" b="0" i="0">
+              <a:rPr sz="1200" b="1" i="0">
+                <a:solidFill>
+                  <a:srgbClr val="F2B880"/>
+                </a:solidFill>
+                <a:latin typeface="Arial"/>
+              </a:rPr>
+              <a:t>bubble R = 26.69 µm</a:t>
+            </a:r>
+          </a:p>
+          <a:p>
+            <a:pPr algn="l">
+              <a:spcAft>
+                <a:spcPts val="0"/>
+              </a:spcAft>
+            </a:pPr>
+            <a:r>
+              <a:rPr sz="1200" b="1" i="0">
+                <a:solidFill>
+                  <a:srgbClr val="F2B880"/>
+                </a:solidFill>
+                <a:latin typeface="Arial"/>
+              </a:rPr>
+              <a:t>(radius ratio 5.34)</a:t>
+            </a:r>
+          </a:p>
+        </p:txBody>
+      </p:sp>
+      <p:sp>
+        <p:nvSpPr>
+          <p:cNvPr id="36" name="C2-E30 text 34" descr="sci-ppt:o034"/>
+          <p:cNvSpPr txBox="1"/>
+          <p:nvPr/>
+        </p:nvSpPr>
+        <p:spPr>
+          <a:xfrm>
+            <a:off x="6903720" y="3566160"/>
+            <a:ext cx="2560320" cy="231648"/>
+          </a:xfrm>
+          <a:prstGeom prst="rect">
+            <a:avLst/>
+          </a:prstGeom>
+          <a:noFill/>
+          <a:effectLst/>
+        </p:spPr>
+        <p:txBody>
+          <a:bodyPr wrap="none" lIns="18288" rIns="18288" tIns="18288" bIns="18288" anchor="t">
+            <a:spAutoFit/>
+          </a:bodyPr>
+          <a:lstStyle/>
+          <a:p>
+            <a:pPr algn="l">
+              <a:spcAft>
+                <a:spcPts val="0"/>
+              </a:spcAft>
+            </a:pPr>
+            <a:r>
+              <a:rPr sz="1200" b="1" i="0">
+                <a:solidFill>
+                  <a:srgbClr val="8EDBD4"/>
+                </a:solidFill>
+                <a:latin typeface="Arial"/>
+              </a:rPr>
+              <a:t>droplet a₀ = 5 µm</a:t>
+            </a:r>
+          </a:p>
+        </p:txBody>
+      </p:sp>
+      <p:sp>
+        <p:nvSpPr>
+          <p:cNvPr id="37" name="C2-E30 text 35" descr="sci-ppt:o035"/>
+          <p:cNvSpPr txBox="1"/>
+          <p:nvPr/>
+        </p:nvSpPr>
+        <p:spPr>
+          <a:xfrm>
+            <a:off x="914400" y="5733288"/>
+            <a:ext cx="10972800" cy="239395"/>
+          </a:xfrm>
+          <a:prstGeom prst="rect">
+            <a:avLst/>
+          </a:prstGeom>
+          <a:noFill/>
+          <a:effectLst/>
+        </p:spPr>
+        <p:txBody>
+          <a:bodyPr wrap="none" lIns="18288" rIns="18288" tIns="18288" bIns="18288" anchor="t">
+            <a:spAutoFit/>
+          </a:bodyPr>
+          <a:lstStyle/>
+          <a:p>
+            <a:pPr algn="l">
+              <a:spcAft>
+                <a:spcPts val="0"/>
+              </a:spcAft>
+            </a:pPr>
+            <a:r>
+              <a:rPr sz="1250" b="0" i="0">
                 <a:solidFill>
                   <a:srgbClr val="E7F0F3"/>
                 </a:solidFill>
                 <a:latin typeface="Arial"/>
               </a:rPr>
-              <a:t>Vapor: R_b,inv = 26.6827 um</a:t>
-            </a:r>
-          </a:p>
-        </p:txBody>
-      </p:sp>
-      <p:sp>
-        <p:nvSpPr>
-          <p:cNvPr id="8" name="text7" descr="sci-ppt:C2-E30-007"/>
+              <a:t>If every PFC molecule becomes ideal vapor at 1 bar, the bubble is 5.3 times the droplet radius, 152 times its volume.</a:t>
+            </a:r>
+          </a:p>
+        </p:txBody>
+      </p:sp>
+      <p:sp>
+        <p:nvSpPr>
+          <p:cNvPr id="38" name="C2-E30 text 36" descr="sci-ppt:o036"/>
           <p:cNvSpPr txBox="1"/>
           <p:nvPr/>
         </p:nvSpPr>
         <p:spPr>
           <a:xfrm>
-            <a:off x="1097280" y="975360"/>
-            <a:ext cx="7559040" cy="359054"/>
+            <a:off x="320040" y="6510528"/>
+            <a:ext cx="11521440" cy="200660"/>
           </a:xfrm>
           <a:prstGeom prst="rect">
             <a:avLst/>
@@ -3322,7 +4566,7 @@
           <a:effectLst/>
         </p:spPr>
         <p:txBody>
-          <a:bodyPr wrap="none" lIns="27432" rIns="27432" tIns="18288" bIns="18288" anchor="ctr">
+          <a:bodyPr wrap="none" lIns="18288" rIns="18288" tIns="18288" bIns="18288" anchor="t">
             <a:spAutoFit/>
           </a:bodyPr>
           <a:lstStyle/>
@@ -3333,413 +4577,13 @@
               </a:spcAft>
             </a:pPr>
             <a:r>
-              <a:rPr sz="1823" b="0" i="0">
-                <a:solidFill>
-                  <a:srgbClr val="E7F0F3"/>
-                </a:solidFill>
-                <a:latin typeface="Arial"/>
-              </a:rPr>
-              <a:t>Same PFC mass</a:t>
-            </a:r>
-          </a:p>
-        </p:txBody>
-      </p:sp>
-      <p:sp>
-        <p:nvSpPr>
-          <p:cNvPr id="9" name="text8" descr="sci-ppt:C2-E30-008"/>
-          <p:cNvSpPr txBox="1"/>
-          <p:nvPr/>
-        </p:nvSpPr>
-        <p:spPr>
-          <a:xfrm>
-            <a:off x="365760" y="4974336"/>
-            <a:ext cx="5547360" cy="321259"/>
-          </a:xfrm>
-          <a:prstGeom prst="rect">
-            <a:avLst/>
-          </a:prstGeom>
-          <a:noFill/>
-          <a:effectLst/>
-        </p:spPr>
-        <p:txBody>
-          <a:bodyPr wrap="none" lIns="27432" rIns="27432" tIns="18288" bIns="18288" anchor="ctr">
-            <a:spAutoFit/>
-          </a:bodyPr>
-          <a:lstStyle/>
-          <a:p>
-            <a:pPr algn="l">
-              <a:spcAft>
-                <a:spcPts val="0"/>
-              </a:spcAft>
-            </a:pPr>
-            <a:r>
-              <a:rPr sz="1632" b="0" i="0">
-                <a:solidFill>
-                  <a:srgbClr val="E7F0F3"/>
-                </a:solidFill>
-                <a:latin typeface="Arial"/>
-              </a:rPr>
-              <a:t>a₀ = 5 μm: original liquid</a:t>
-            </a:r>
-          </a:p>
-        </p:txBody>
-      </p:sp>
-      <p:sp>
-        <p:nvSpPr>
-          <p:cNvPr id="10" name="text9" descr="sci-ppt:C2-E30-009"/>
-          <p:cNvSpPr txBox="1"/>
-          <p:nvPr/>
-        </p:nvSpPr>
-        <p:spPr>
-          <a:xfrm>
-            <a:off x="365760" y="5266944"/>
-            <a:ext cx="5547360" cy="321259"/>
-          </a:xfrm>
-          <a:prstGeom prst="rect">
-            <a:avLst/>
-          </a:prstGeom>
-          <a:noFill/>
-          <a:effectLst/>
-        </p:spPr>
-        <p:txBody>
-          <a:bodyPr wrap="none" lIns="27432" rIns="27432" tIns="18288" bIns="18288" anchor="ctr">
-            <a:spAutoFit/>
-          </a:bodyPr>
-          <a:lstStyle/>
-          <a:p>
-            <a:pPr algn="l">
-              <a:spcAft>
-                <a:spcPts val="0"/>
-              </a:spcAft>
-            </a:pPr>
-            <a:r>
-              <a:rPr sz="1632" b="0" i="0">
-                <a:solidFill>
-                  <a:srgbClr val="E7F0F3"/>
-                </a:solidFill>
-                <a:latin typeface="Arial"/>
-              </a:rPr>
-              <a:t>m_PFC,0, ρ_d: original inventory</a:t>
-            </a:r>
-          </a:p>
-        </p:txBody>
-      </p:sp>
-      <p:sp>
-        <p:nvSpPr>
-          <p:cNvPr id="11" name="text10" descr="sci-ppt:C2-E30-010"/>
-          <p:cNvSpPr txBox="1"/>
-          <p:nvPr/>
-        </p:nvSpPr>
-        <p:spPr>
-          <a:xfrm>
-            <a:off x="365760" y="5559552"/>
-            <a:ext cx="5547360" cy="321259"/>
-          </a:xfrm>
-          <a:prstGeom prst="rect">
-            <a:avLst/>
-          </a:prstGeom>
-          <a:noFill/>
-          <a:effectLst/>
-        </p:spPr>
-        <p:txBody>
-          <a:bodyPr wrap="none" lIns="27432" rIns="27432" tIns="18288" bIns="18288" anchor="ctr">
-            <a:spAutoFit/>
-          </a:bodyPr>
-          <a:lstStyle/>
-          <a:p>
-            <a:pPr algn="l">
-              <a:spcAft>
-                <a:spcPts val="0"/>
-              </a:spcAft>
-            </a:pPr>
-            <a:r>
-              <a:rPr sz="1632" b="0" i="0">
-                <a:solidFill>
-                  <a:srgbClr val="E7F0F3"/>
-                </a:solidFill>
-                <a:latin typeface="Arial"/>
-              </a:rPr>
-              <a:t>p_v,PFC = 100 kPa</a:t>
-            </a:r>
-          </a:p>
-        </p:txBody>
-      </p:sp>
-      <p:sp>
-        <p:nvSpPr>
-          <p:cNvPr id="12" name="text11" descr="sci-ppt:C2-E30-011"/>
-          <p:cNvSpPr txBox="1"/>
-          <p:nvPr/>
-        </p:nvSpPr>
-        <p:spPr>
-          <a:xfrm>
-            <a:off x="365760" y="5852160"/>
-            <a:ext cx="5547360" cy="321259"/>
-          </a:xfrm>
-          <a:prstGeom prst="rect">
-            <a:avLst/>
-          </a:prstGeom>
-          <a:noFill/>
-          <a:effectLst/>
-        </p:spPr>
-        <p:txBody>
-          <a:bodyPr wrap="none" lIns="27432" rIns="27432" tIns="18288" bIns="18288" anchor="ctr">
-            <a:spAutoFit/>
-          </a:bodyPr>
-          <a:lstStyle/>
-          <a:p>
-            <a:pPr algn="l">
-              <a:spcAft>
-                <a:spcPts val="0"/>
-              </a:spcAft>
-            </a:pPr>
-            <a:r>
-              <a:rPr sz="1632" b="0" i="0">
-                <a:solidFill>
-                  <a:srgbClr val="E7F0F3"/>
-                </a:solidFill>
-                <a:latin typeface="Arial"/>
-              </a:rPr>
-              <a:t>151.9778: volume expansion</a:t>
-            </a:r>
-          </a:p>
-        </p:txBody>
-      </p:sp>
-      <p:sp>
-        <p:nvSpPr>
-          <p:cNvPr id="13" name="text12" descr="sci-ppt:C2-E30-012"/>
-          <p:cNvSpPr txBox="1"/>
-          <p:nvPr/>
-        </p:nvSpPr>
-        <p:spPr>
-          <a:xfrm>
-            <a:off x="6156960" y="4974336"/>
-            <a:ext cx="5547360" cy="321259"/>
-          </a:xfrm>
-          <a:prstGeom prst="rect">
-            <a:avLst/>
-          </a:prstGeom>
-          <a:noFill/>
-          <a:effectLst/>
-        </p:spPr>
-        <p:txBody>
-          <a:bodyPr wrap="none" lIns="27432" rIns="27432" tIns="18288" bIns="18288" anchor="ctr">
-            <a:spAutoFit/>
-          </a:bodyPr>
-          <a:lstStyle/>
-          <a:p>
-            <a:pPr algn="l">
-              <a:spcAft>
-                <a:spcPts val="0"/>
-              </a:spcAft>
-            </a:pPr>
-            <a:r>
-              <a:rPr sz="1632" b="0" i="0">
-                <a:solidFill>
-                  <a:srgbClr val="E7F0F3"/>
-                </a:solidFill>
-                <a:latin typeface="Arial"/>
-              </a:rPr>
-              <a:t>R_b,inv = 26.6827 μm: assumed vapor state</a:t>
-            </a:r>
-          </a:p>
-        </p:txBody>
-      </p:sp>
-      <p:sp>
-        <p:nvSpPr>
-          <p:cNvPr id="14" name="text13" descr="sci-ppt:C2-E30-013"/>
-          <p:cNvSpPr txBox="1"/>
-          <p:nvPr/>
-        </p:nvSpPr>
-        <p:spPr>
-          <a:xfrm>
-            <a:off x="6156960" y="5266944"/>
-            <a:ext cx="5547360" cy="321259"/>
-          </a:xfrm>
-          <a:prstGeom prst="rect">
-            <a:avLst/>
-          </a:prstGeom>
-          <a:noFill/>
-          <a:effectLst/>
-        </p:spPr>
-        <p:txBody>
-          <a:bodyPr wrap="none" lIns="27432" rIns="27432" tIns="18288" bIns="18288" anchor="ctr">
-            <a:spAutoFit/>
-          </a:bodyPr>
-          <a:lstStyle/>
-          <a:p>
-            <a:pPr algn="l">
-              <a:spcAft>
-                <a:spcPts val="0"/>
-              </a:spcAft>
-            </a:pPr>
-            <a:r>
-              <a:rPr sz="1632" b="0" i="0">
-                <a:solidFill>
-                  <a:srgbClr val="E7F0F3"/>
-                </a:solidFill>
-                <a:latin typeface="Arial"/>
-              </a:rPr>
-              <a:t>T_* = 323 K</a:t>
-            </a:r>
-          </a:p>
-        </p:txBody>
-      </p:sp>
-      <p:sp>
-        <p:nvSpPr>
-          <p:cNvPr id="15" name="text14" descr="sci-ppt:C2-E30-014"/>
-          <p:cNvSpPr txBox="1"/>
-          <p:nvPr/>
-        </p:nvSpPr>
-        <p:spPr>
-          <a:xfrm>
-            <a:off x="6156960" y="5559552"/>
-            <a:ext cx="5547360" cy="321259"/>
-          </a:xfrm>
-          <a:prstGeom prst="rect">
-            <a:avLst/>
-          </a:prstGeom>
-          <a:noFill/>
-          <a:effectLst/>
-        </p:spPr>
-        <p:txBody>
-          <a:bodyPr wrap="none" lIns="27432" rIns="27432" tIns="18288" bIns="18288" anchor="ctr">
-            <a:spAutoFit/>
-          </a:bodyPr>
-          <a:lstStyle/>
-          <a:p>
-            <a:pPr algn="l">
-              <a:spcAft>
-                <a:spcPts val="0"/>
-              </a:spcAft>
-            </a:pPr>
-            <a:r>
-              <a:rPr sz="1632" b="0" i="0">
-                <a:solidFill>
-                  <a:srgbClr val="E7F0F3"/>
-                </a:solidFill>
-                <a:latin typeface="Arial"/>
-              </a:rPr>
-              <a:t>M_PFC, R_u: ideal mole relation</a:t>
-            </a:r>
-          </a:p>
-        </p:txBody>
-      </p:sp>
-      <p:sp>
-        <p:nvSpPr>
-          <p:cNvPr id="16" name="text15" descr="sci-ppt:C2-E30-015"/>
-          <p:cNvSpPr txBox="1"/>
-          <p:nvPr/>
-        </p:nvSpPr>
-        <p:spPr>
-          <a:xfrm>
-            <a:off x="6156960" y="5852160"/>
-            <a:ext cx="5547360" cy="321259"/>
-          </a:xfrm>
-          <a:prstGeom prst="rect">
-            <a:avLst/>
-          </a:prstGeom>
-          <a:noFill/>
-          <a:effectLst/>
-        </p:spPr>
-        <p:txBody>
-          <a:bodyPr wrap="none" lIns="27432" rIns="27432" tIns="18288" bIns="18288" anchor="ctr">
-            <a:spAutoFit/>
-          </a:bodyPr>
-          <a:lstStyle/>
-          <a:p>
-            <a:pPr algn="l">
-              <a:spcAft>
-                <a:spcPts val="0"/>
-              </a:spcAft>
-            </a:pPr>
-            <a:r>
-              <a:rPr sz="1632" b="0" i="0">
-                <a:solidFill>
-                  <a:srgbClr val="E7F0F3"/>
-                </a:solidFill>
-                <a:latin typeface="Arial"/>
-              </a:rPr>
-              <a:t>π: sphere geometry</a:t>
-            </a:r>
-          </a:p>
-        </p:txBody>
-      </p:sp>
-      <p:sp>
-        <p:nvSpPr>
-          <p:cNvPr id="17" name="text16" descr="sci-ppt:C2-E30-016"/>
-          <p:cNvSpPr txBox="1"/>
-          <p:nvPr/>
-        </p:nvSpPr>
-        <p:spPr>
-          <a:xfrm>
-            <a:off x="365760" y="6339840"/>
-            <a:ext cx="11277600" cy="302361"/>
-          </a:xfrm>
-          <a:prstGeom prst="rect">
-            <a:avLst/>
-          </a:prstGeom>
-          <a:noFill/>
-          <a:effectLst/>
-        </p:spPr>
-        <p:txBody>
-          <a:bodyPr wrap="none" lIns="27432" rIns="27432" tIns="18288" bIns="18288" anchor="ctr">
-            <a:spAutoFit/>
-          </a:bodyPr>
-          <a:lstStyle/>
-          <a:p>
-            <a:pPr algn="l">
-              <a:spcAft>
-                <a:spcPts val="0"/>
-              </a:spcAft>
-            </a:pPr>
-            <a:r>
-              <a:rPr sz="1536" b="0" i="0">
+              <a:rPr sz="1000" b="0" i="0">
                 <a:solidFill>
                   <a:srgbClr val="B4C7D2"/>
                 </a:solidFill>
                 <a:latin typeface="Arial"/>
               </a:rPr>
-              <a:t>Volume ratio is about 152; radius ratio about 5.34</a:t>
-            </a:r>
-          </a:p>
-        </p:txBody>
-      </p:sp>
-      <p:sp>
-        <p:nvSpPr>
-          <p:cNvPr id="18" name="text17" descr="sci-ppt:C2-E30-017"/>
-          <p:cNvSpPr txBox="1"/>
-          <p:nvPr/>
-        </p:nvSpPr>
-        <p:spPr>
-          <a:xfrm>
-            <a:off x="365760" y="6632448"/>
-            <a:ext cx="11277600" cy="302361"/>
-          </a:xfrm>
-          <a:prstGeom prst="rect">
-            <a:avLst/>
-          </a:prstGeom>
-          <a:noFill/>
-          <a:effectLst/>
-        </p:spPr>
-        <p:txBody>
-          <a:bodyPr wrap="none" lIns="27432" rIns="27432" tIns="18288" bIns="18288" anchor="ctr">
-            <a:spAutoFit/>
-          </a:bodyPr>
-          <a:lstStyle/>
-          <a:p>
-            <a:pPr algn="l">
-              <a:spcAft>
-                <a:spcPts val="0"/>
-              </a:spcAft>
-            </a:pPr>
-            <a:r>
-              <a:rPr sz="1536" b="0" i="0">
-                <a:solidFill>
-                  <a:srgbClr val="B4C7D2"/>
-                </a:solidFill>
-                <a:latin typeface="Arial"/>
-              </a:rPr>
-              <a:t>Inventory radius is not dynamical R_max</a:t>
+              <a:t>Inventory radius of Eq. C2-E30 (M_PFC = 0.2880343 kg/mol, ρ_d = 1630 kg/m³).</a:t>
             </a:r>
           </a:p>
         </p:txBody>
